--- a/files/Lecture_19.pptx
+++ b/files/Lecture_19.pptx
@@ -127,20 +127,12 @@
 </p:presentation>
 </file>
 
-<file path=ppt/revisionInfo.xml><?xml version="1.0" encoding="utf-8"?>
-<p1510:revInfo xmlns:a="http://schemas.openxmlformats.org/drawingml/2006/main" xmlns:r="http://schemas.openxmlformats.org/officeDocument/2006/relationships" xmlns:p1510="http://schemas.microsoft.com/office/powerpoint/2015/10/main">
-  <p1510:revLst>
-    <p1510:client id="{5094C746-FBC2-4427-BB79-E61923C9FDFD}" v="40" dt="2026-09-18T08:09:42.227"/>
-  </p1510:revLst>
-</p1510:revInfo>
-</file>
-
 <file path=ppt/changesInfos/changesInfo1.xml><?xml version="1.0" encoding="utf-8"?>
 <pc:chgInfo xmlns:a="http://schemas.openxmlformats.org/drawingml/2006/main" xmlns:r="http://schemas.openxmlformats.org/officeDocument/2006/relationships" xmlns:ac="http://schemas.microsoft.com/office/drawing/2013/main/command" xmlns:pc="http://schemas.microsoft.com/office/powerpoint/2013/main/command">
   <pc:docChgLst>
     <pc:chgData name="Khobo, IL, Dr [ilkhobo@sun.ac.za]" userId="b519a442-dcea-4a28-9c45-7e29f1df5837" providerId="ADAL" clId="{8BC8A5CF-2DB3-45E9-BF57-F2ED810C291E}"/>
     <pc:docChg chg="undo custSel addSld delSld modSld sldOrd">
-      <pc:chgData name="Khobo, IL, Dr [ilkhobo@sun.ac.za]" userId="b519a442-dcea-4a28-9c45-7e29f1df5837" providerId="ADAL" clId="{8BC8A5CF-2DB3-45E9-BF57-F2ED810C291E}" dt="2026-09-18T08:09:45.153" v="3936"/>
+      <pc:chgData name="Khobo, IL, Dr [ilkhobo@sun.ac.za]" userId="b519a442-dcea-4a28-9c45-7e29f1df5837" providerId="ADAL" clId="{8BC8A5CF-2DB3-45E9-BF57-F2ED810C291E}" dt="2026-09-19T09:29:57.329" v="3940" actId="20577"/>
       <pc:docMkLst>
         <pc:docMk/>
       </pc:docMkLst>
@@ -245,70 +237,6 @@
             <ac:grpSpMk id="26" creationId="{CFF30133-4E4D-1A59-05DD-7406EE6C2FE5}"/>
           </ac:grpSpMkLst>
         </pc:grpChg>
-        <pc:picChg chg="add del mod">
-          <ac:chgData name="Khobo, IL, Dr [ilkhobo@sun.ac.za]" userId="b519a442-dcea-4a28-9c45-7e29f1df5837" providerId="ADAL" clId="{8BC8A5CF-2DB3-45E9-BF57-F2ED810C291E}" dt="2026-09-17T18:09:33.328" v="2413" actId="478"/>
-          <ac:picMkLst>
-            <pc:docMk/>
-            <pc:sldMk cId="3688302285" sldId="598"/>
-            <ac:picMk id="3" creationId="{01A0E182-4087-3771-777B-0567CF1A5C63}"/>
-          </ac:picMkLst>
-        </pc:picChg>
-        <pc:picChg chg="add del mod">
-          <ac:chgData name="Khobo, IL, Dr [ilkhobo@sun.ac.za]" userId="b519a442-dcea-4a28-9c45-7e29f1df5837" providerId="ADAL" clId="{8BC8A5CF-2DB3-45E9-BF57-F2ED810C291E}" dt="2026-09-17T18:00:36.395" v="2392" actId="478"/>
-          <ac:picMkLst>
-            <pc:docMk/>
-            <pc:sldMk cId="3688302285" sldId="598"/>
-            <ac:picMk id="5" creationId="{968A5EAF-3811-9E15-2A14-1197FF5B598A}"/>
-          </ac:picMkLst>
-        </pc:picChg>
-        <pc:picChg chg="add del mod">
-          <ac:chgData name="Khobo, IL, Dr [ilkhobo@sun.ac.za]" userId="b519a442-dcea-4a28-9c45-7e29f1df5837" providerId="ADAL" clId="{8BC8A5CF-2DB3-45E9-BF57-F2ED810C291E}" dt="2026-09-17T18:00:50.075" v="2399" actId="478"/>
-          <ac:picMkLst>
-            <pc:docMk/>
-            <pc:sldMk cId="3688302285" sldId="598"/>
-            <ac:picMk id="7" creationId="{6562A962-C4FC-B54C-4D4B-776F110B98F1}"/>
-          </ac:picMkLst>
-        </pc:picChg>
-        <pc:picChg chg="add del mod">
-          <ac:chgData name="Khobo, IL, Dr [ilkhobo@sun.ac.za]" userId="b519a442-dcea-4a28-9c45-7e29f1df5837" providerId="ADAL" clId="{8BC8A5CF-2DB3-45E9-BF57-F2ED810C291E}" dt="2026-09-17T18:00:53.023" v="2400" actId="478"/>
-          <ac:picMkLst>
-            <pc:docMk/>
-            <pc:sldMk cId="3688302285" sldId="598"/>
-            <ac:picMk id="9" creationId="{D918562F-98D5-933D-F0BC-602FE2DE611F}"/>
-          </ac:picMkLst>
-        </pc:picChg>
-        <pc:picChg chg="add del mod">
-          <ac:chgData name="Khobo, IL, Dr [ilkhobo@sun.ac.za]" userId="b519a442-dcea-4a28-9c45-7e29f1df5837" providerId="ADAL" clId="{8BC8A5CF-2DB3-45E9-BF57-F2ED810C291E}" dt="2026-09-17T18:09:33.328" v="2413" actId="478"/>
-          <ac:picMkLst>
-            <pc:docMk/>
-            <pc:sldMk cId="3688302285" sldId="598"/>
-            <ac:picMk id="11" creationId="{6DB5BDA9-7F6D-B48F-B434-1B2C801B02A3}"/>
-          </ac:picMkLst>
-        </pc:picChg>
-        <pc:picChg chg="add del mod">
-          <ac:chgData name="Khobo, IL, Dr [ilkhobo@sun.ac.za]" userId="b519a442-dcea-4a28-9c45-7e29f1df5837" providerId="ADAL" clId="{8BC8A5CF-2DB3-45E9-BF57-F2ED810C291E}" dt="2026-09-17T18:09:33.328" v="2413" actId="478"/>
-          <ac:picMkLst>
-            <pc:docMk/>
-            <pc:sldMk cId="3688302285" sldId="598"/>
-            <ac:picMk id="13" creationId="{977C56DE-93BA-E856-D818-1042BDF9BE1D}"/>
-          </ac:picMkLst>
-        </pc:picChg>
-        <pc:picChg chg="add del mod">
-          <ac:chgData name="Khobo, IL, Dr [ilkhobo@sun.ac.za]" userId="b519a442-dcea-4a28-9c45-7e29f1df5837" providerId="ADAL" clId="{8BC8A5CF-2DB3-45E9-BF57-F2ED810C291E}" dt="2026-09-17T18:09:33.328" v="2413" actId="478"/>
-          <ac:picMkLst>
-            <pc:docMk/>
-            <pc:sldMk cId="3688302285" sldId="598"/>
-            <ac:picMk id="15" creationId="{C6802A1A-55C3-F12B-6EA3-8FD8ED474BD2}"/>
-          </ac:picMkLst>
-        </pc:picChg>
-        <pc:picChg chg="add del">
-          <ac:chgData name="Khobo, IL, Dr [ilkhobo@sun.ac.za]" userId="b519a442-dcea-4a28-9c45-7e29f1df5837" providerId="ADAL" clId="{8BC8A5CF-2DB3-45E9-BF57-F2ED810C291E}" dt="2026-09-17T18:09:36.068" v="2415" actId="478"/>
-          <ac:picMkLst>
-            <pc:docMk/>
-            <pc:sldMk cId="3688302285" sldId="598"/>
-            <ac:picMk id="17" creationId="{E3E4BD5B-1C9D-C88B-0441-A7971DE00DFA}"/>
-          </ac:picMkLst>
-        </pc:picChg>
         <pc:picChg chg="add mod modCrop">
           <ac:chgData name="Khobo, IL, Dr [ilkhobo@sun.ac.za]" userId="b519a442-dcea-4a28-9c45-7e29f1df5837" providerId="ADAL" clId="{8BC8A5CF-2DB3-45E9-BF57-F2ED810C291E}" dt="2026-09-17T18:18:01.990" v="2584" actId="1076"/>
           <ac:picMkLst>
@@ -354,30 +282,6 @@
             <pc:docMk/>
             <pc:sldMk cId="1050411075" sldId="599"/>
             <ac:picMk id="5" creationId="{122CDC22-0646-04A8-03DA-097FF23585F5}"/>
-          </ac:picMkLst>
-        </pc:picChg>
-        <pc:picChg chg="del">
-          <ac:chgData name="Khobo, IL, Dr [ilkhobo@sun.ac.za]" userId="b519a442-dcea-4a28-9c45-7e29f1df5837" providerId="ADAL" clId="{8BC8A5CF-2DB3-45E9-BF57-F2ED810C291E}" dt="2026-09-17T18:22:10.652" v="2758" actId="21"/>
-          <ac:picMkLst>
-            <pc:docMk/>
-            <pc:sldMk cId="1050411075" sldId="599"/>
-            <ac:picMk id="11" creationId="{7B3E02F1-7380-A318-BC93-E0105F1E21CB}"/>
-          </ac:picMkLst>
-        </pc:picChg>
-        <pc:picChg chg="del">
-          <ac:chgData name="Khobo, IL, Dr [ilkhobo@sun.ac.za]" userId="b519a442-dcea-4a28-9c45-7e29f1df5837" providerId="ADAL" clId="{8BC8A5CF-2DB3-45E9-BF57-F2ED810C291E}" dt="2026-09-17T18:22:10.652" v="2758" actId="21"/>
-          <ac:picMkLst>
-            <pc:docMk/>
-            <pc:sldMk cId="1050411075" sldId="599"/>
-            <ac:picMk id="13" creationId="{13A16550-053A-31AC-72EE-EA2F664AF768}"/>
-          </ac:picMkLst>
-        </pc:picChg>
-        <pc:picChg chg="del">
-          <ac:chgData name="Khobo, IL, Dr [ilkhobo@sun.ac.za]" userId="b519a442-dcea-4a28-9c45-7e29f1df5837" providerId="ADAL" clId="{8BC8A5CF-2DB3-45E9-BF57-F2ED810C291E}" dt="2026-09-17T18:22:10.652" v="2758" actId="21"/>
-          <ac:picMkLst>
-            <pc:docMk/>
-            <pc:sldMk cId="1050411075" sldId="599"/>
-            <ac:picMk id="15" creationId="{122CDC22-0646-04A8-03DA-097FF23585F5}"/>
           </ac:picMkLst>
         </pc:picChg>
       </pc:sldChg>
@@ -435,54 +339,6 @@
             <ac:spMk id="36" creationId="{C96DD721-5B5F-5B8B-F4EA-5F6F55960A2F}"/>
           </ac:spMkLst>
         </pc:spChg>
-        <pc:graphicFrameChg chg="add del mod modGraphic">
-          <ac:chgData name="Khobo, IL, Dr [ilkhobo@sun.ac.za]" userId="b519a442-dcea-4a28-9c45-7e29f1df5837" providerId="ADAL" clId="{8BC8A5CF-2DB3-45E9-BF57-F2ED810C291E}" dt="2026-09-17T18:57:08.010" v="3261" actId="478"/>
-          <ac:graphicFrameMkLst>
-            <pc:docMk/>
-            <pc:sldMk cId="1771664255" sldId="600"/>
-            <ac:graphicFrameMk id="18" creationId="{7E63B4CE-BA13-FFC7-CD16-8B475E7FB3D0}"/>
-          </ac:graphicFrameMkLst>
-        </pc:graphicFrameChg>
-        <pc:picChg chg="del">
-          <ac:chgData name="Khobo, IL, Dr [ilkhobo@sun.ac.za]" userId="b519a442-dcea-4a28-9c45-7e29f1df5837" providerId="ADAL" clId="{8BC8A5CF-2DB3-45E9-BF57-F2ED810C291E}" dt="2026-09-17T18:26:10.701" v="2770" actId="478"/>
-          <ac:picMkLst>
-            <pc:docMk/>
-            <pc:sldMk cId="1771664255" sldId="600"/>
-            <ac:picMk id="2" creationId="{5A2F9F37-8A1F-B288-9754-1CCDC7AE1201}"/>
-          </ac:picMkLst>
-        </pc:picChg>
-        <pc:picChg chg="del">
-          <ac:chgData name="Khobo, IL, Dr [ilkhobo@sun.ac.za]" userId="b519a442-dcea-4a28-9c45-7e29f1df5837" providerId="ADAL" clId="{8BC8A5CF-2DB3-45E9-BF57-F2ED810C291E}" dt="2026-09-17T18:26:10.701" v="2770" actId="478"/>
-          <ac:picMkLst>
-            <pc:docMk/>
-            <pc:sldMk cId="1771664255" sldId="600"/>
-            <ac:picMk id="3" creationId="{5D202BB7-2FF8-5D79-6625-CA2E1A374C5D}"/>
-          </ac:picMkLst>
-        </pc:picChg>
-        <pc:picChg chg="del">
-          <ac:chgData name="Khobo, IL, Dr [ilkhobo@sun.ac.za]" userId="b519a442-dcea-4a28-9c45-7e29f1df5837" providerId="ADAL" clId="{8BC8A5CF-2DB3-45E9-BF57-F2ED810C291E}" dt="2026-09-17T18:26:10.701" v="2770" actId="478"/>
-          <ac:picMkLst>
-            <pc:docMk/>
-            <pc:sldMk cId="1771664255" sldId="600"/>
-            <ac:picMk id="4" creationId="{7D331360-6474-BCD6-FB7E-333236AE90FB}"/>
-          </ac:picMkLst>
-        </pc:picChg>
-        <pc:picChg chg="del">
-          <ac:chgData name="Khobo, IL, Dr [ilkhobo@sun.ac.za]" userId="b519a442-dcea-4a28-9c45-7e29f1df5837" providerId="ADAL" clId="{8BC8A5CF-2DB3-45E9-BF57-F2ED810C291E}" dt="2026-09-17T18:26:10.701" v="2770" actId="478"/>
-          <ac:picMkLst>
-            <pc:docMk/>
-            <pc:sldMk cId="1771664255" sldId="600"/>
-            <ac:picMk id="5" creationId="{AFB738E5-1DF7-C336-D41B-11E5B1E3634E}"/>
-          </ac:picMkLst>
-        </pc:picChg>
-        <pc:picChg chg="add del mod">
-          <ac:chgData name="Khobo, IL, Dr [ilkhobo@sun.ac.za]" userId="b519a442-dcea-4a28-9c45-7e29f1df5837" providerId="ADAL" clId="{8BC8A5CF-2DB3-45E9-BF57-F2ED810C291E}" dt="2026-09-17T18:55:23.287" v="3238" actId="21"/>
-          <ac:picMkLst>
-            <pc:docMk/>
-            <pc:sldMk cId="1771664255" sldId="600"/>
-            <ac:picMk id="16" creationId="{D5684F58-1131-02DE-EC53-662315B936FD}"/>
-          </ac:picMkLst>
-        </pc:picChg>
         <pc:picChg chg="add mod">
           <ac:chgData name="Khobo, IL, Dr [ilkhobo@sun.ac.za]" userId="b519a442-dcea-4a28-9c45-7e29f1df5837" providerId="ADAL" clId="{8BC8A5CF-2DB3-45E9-BF57-F2ED810C291E}" dt="2026-09-17T18:59:04.523" v="3276" actId="14100"/>
           <ac:picMkLst>
@@ -506,46 +362,6 @@
             <ac:spMk id="3" creationId="{40F4D0AA-3AFA-287F-C11C-5B52A71F3EA0}"/>
           </ac:spMkLst>
         </pc:spChg>
-        <pc:spChg chg="add del">
-          <ac:chgData name="Khobo, IL, Dr [ilkhobo@sun.ac.za]" userId="b519a442-dcea-4a28-9c45-7e29f1df5837" providerId="ADAL" clId="{8BC8A5CF-2DB3-45E9-BF57-F2ED810C291E}" dt="2026-09-17T18:38:01.661" v="3059" actId="478"/>
-          <ac:spMkLst>
-            <pc:docMk/>
-            <pc:sldMk cId="261590760" sldId="601"/>
-            <ac:spMk id="5" creationId="{4CFC167E-5B30-5DEE-51BD-6A77E7F2F098}"/>
-          </ac:spMkLst>
-        </pc:spChg>
-        <pc:spChg chg="del">
-          <ac:chgData name="Khobo, IL, Dr [ilkhobo@sun.ac.za]" userId="b519a442-dcea-4a28-9c45-7e29f1df5837" providerId="ADAL" clId="{8BC8A5CF-2DB3-45E9-BF57-F2ED810C291E}" dt="2026-09-17T18:36:38.740" v="3055" actId="478"/>
-          <ac:spMkLst>
-            <pc:docMk/>
-            <pc:sldMk cId="261590760" sldId="601"/>
-            <ac:spMk id="6" creationId="{A2F95981-3252-94EB-2E14-DEACD15D440E}"/>
-          </ac:spMkLst>
-        </pc:spChg>
-        <pc:spChg chg="del mod">
-          <ac:chgData name="Khobo, IL, Dr [ilkhobo@sun.ac.za]" userId="b519a442-dcea-4a28-9c45-7e29f1df5837" providerId="ADAL" clId="{8BC8A5CF-2DB3-45E9-BF57-F2ED810C291E}" dt="2026-09-17T18:36:38.740" v="3055" actId="478"/>
-          <ac:spMkLst>
-            <pc:docMk/>
-            <pc:sldMk cId="261590760" sldId="601"/>
-            <ac:spMk id="8" creationId="{CC68CA2B-93AD-51D6-A896-D3BE1DB5B4CB}"/>
-          </ac:spMkLst>
-        </pc:spChg>
-        <pc:spChg chg="add del">
-          <ac:chgData name="Khobo, IL, Dr [ilkhobo@sun.ac.za]" userId="b519a442-dcea-4a28-9c45-7e29f1df5837" providerId="ADAL" clId="{8BC8A5CF-2DB3-45E9-BF57-F2ED810C291E}" dt="2026-09-17T18:38:01.661" v="3059" actId="478"/>
-          <ac:spMkLst>
-            <pc:docMk/>
-            <pc:sldMk cId="261590760" sldId="601"/>
-            <ac:spMk id="9" creationId="{76329B20-1687-CAB5-E8E0-FD7B8196CDF8}"/>
-          </ac:spMkLst>
-        </pc:spChg>
-        <pc:spChg chg="del">
-          <ac:chgData name="Khobo, IL, Dr [ilkhobo@sun.ac.za]" userId="b519a442-dcea-4a28-9c45-7e29f1df5837" providerId="ADAL" clId="{8BC8A5CF-2DB3-45E9-BF57-F2ED810C291E}" dt="2026-09-17T18:36:38.740" v="3055" actId="478"/>
-          <ac:spMkLst>
-            <pc:docMk/>
-            <pc:sldMk cId="261590760" sldId="601"/>
-            <ac:spMk id="10" creationId="{3C998AD1-233F-98A1-09E4-1BC3A2F75DC6}"/>
-          </ac:spMkLst>
-        </pc:spChg>
         <pc:spChg chg="mod">
           <ac:chgData name="Khobo, IL, Dr [ilkhobo@sun.ac.za]" userId="b519a442-dcea-4a28-9c45-7e29f1df5837" providerId="ADAL" clId="{8BC8A5CF-2DB3-45E9-BF57-F2ED810C291E}" dt="2026-09-17T18:57:49.962" v="3263" actId="1076"/>
           <ac:spMkLst>
@@ -554,44 +370,12 @@
             <ac:spMk id="12" creationId="{2677F251-E33C-9600-CB60-9AFCC3F7518C}"/>
           </ac:spMkLst>
         </pc:spChg>
-        <pc:spChg chg="add del">
-          <ac:chgData name="Khobo, IL, Dr [ilkhobo@sun.ac.za]" userId="b519a442-dcea-4a28-9c45-7e29f1df5837" providerId="ADAL" clId="{8BC8A5CF-2DB3-45E9-BF57-F2ED810C291E}" dt="2026-09-17T18:38:01.661" v="3059" actId="478"/>
-          <ac:spMkLst>
-            <pc:docMk/>
-            <pc:sldMk cId="261590760" sldId="601"/>
-            <ac:spMk id="13" creationId="{A613CE3D-C698-705D-3254-493B323ABF10}"/>
-          </ac:spMkLst>
-        </pc:spChg>
         <pc:spChg chg="mod">
           <ac:chgData name="Khobo, IL, Dr [ilkhobo@sun.ac.za]" userId="b519a442-dcea-4a28-9c45-7e29f1df5837" providerId="ADAL" clId="{8BC8A5CF-2DB3-45E9-BF57-F2ED810C291E}" dt="2026-09-17T18:57:49.962" v="3263" actId="1076"/>
           <ac:spMkLst>
             <pc:docMk/>
             <pc:sldMk cId="261590760" sldId="601"/>
             <ac:spMk id="14" creationId="{F1D85BCE-1043-711B-B7C7-4BBE86690CC6}"/>
-          </ac:spMkLst>
-        </pc:spChg>
-        <pc:spChg chg="add del">
-          <ac:chgData name="Khobo, IL, Dr [ilkhobo@sun.ac.za]" userId="b519a442-dcea-4a28-9c45-7e29f1df5837" providerId="ADAL" clId="{8BC8A5CF-2DB3-45E9-BF57-F2ED810C291E}" dt="2026-09-17T18:46:15.273" v="3101" actId="478"/>
-          <ac:spMkLst>
-            <pc:docMk/>
-            <pc:sldMk cId="261590760" sldId="601"/>
-            <ac:spMk id="16" creationId="{C4A27A5E-C422-81AA-A35D-3DCC71AC7D81}"/>
-          </ac:spMkLst>
-        </pc:spChg>
-        <pc:spChg chg="add del">
-          <ac:chgData name="Khobo, IL, Dr [ilkhobo@sun.ac.za]" userId="b519a442-dcea-4a28-9c45-7e29f1df5837" providerId="ADAL" clId="{8BC8A5CF-2DB3-45E9-BF57-F2ED810C291E}" dt="2026-09-17T18:46:15.273" v="3101" actId="478"/>
-          <ac:spMkLst>
-            <pc:docMk/>
-            <pc:sldMk cId="261590760" sldId="601"/>
-            <ac:spMk id="18" creationId="{A1833ED5-C287-8BA0-F196-57ED1E4ADABE}"/>
-          </ac:spMkLst>
-        </pc:spChg>
-        <pc:spChg chg="add del">
-          <ac:chgData name="Khobo, IL, Dr [ilkhobo@sun.ac.za]" userId="b519a442-dcea-4a28-9c45-7e29f1df5837" providerId="ADAL" clId="{8BC8A5CF-2DB3-45E9-BF57-F2ED810C291E}" dt="2026-09-17T18:46:15.273" v="3101" actId="478"/>
-          <ac:spMkLst>
-            <pc:docMk/>
-            <pc:sldMk cId="261590760" sldId="601"/>
-            <ac:spMk id="20" creationId="{9F98EBA4-C24D-83F5-4303-50E1C977A509}"/>
           </ac:spMkLst>
         </pc:spChg>
         <pc:spChg chg="add">
@@ -649,14 +433,6 @@
           <pc:docMk/>
           <pc:sldMk cId="3773195825" sldId="602"/>
         </pc:sldMkLst>
-        <pc:spChg chg="del mod">
-          <ac:chgData name="Khobo, IL, Dr [ilkhobo@sun.ac.za]" userId="b519a442-dcea-4a28-9c45-7e29f1df5837" providerId="ADAL" clId="{8BC8A5CF-2DB3-45E9-BF57-F2ED810C291E}" dt="2026-09-17T18:49:47.211" v="3203" actId="478"/>
-          <ac:spMkLst>
-            <pc:docMk/>
-            <pc:sldMk cId="3773195825" sldId="602"/>
-            <ac:spMk id="3" creationId="{C9D217E4-B2B3-56C8-1DDF-4EA1DE6BAC58}"/>
-          </ac:spMkLst>
-        </pc:spChg>
         <pc:spChg chg="add mod">
           <ac:chgData name="Khobo, IL, Dr [ilkhobo@sun.ac.za]" userId="b519a442-dcea-4a28-9c45-7e29f1df5837" providerId="ADAL" clId="{8BC8A5CF-2DB3-45E9-BF57-F2ED810C291E}" dt="2026-09-17T18:50:23.162" v="3209" actId="1076"/>
           <ac:spMkLst>
@@ -697,68 +473,12 @@
             <ac:spMk id="12" creationId="{72EB95C8-61F4-88A6-BC53-4725675B496A}"/>
           </ac:spMkLst>
         </pc:spChg>
-        <pc:spChg chg="add del">
-          <ac:chgData name="Khobo, IL, Dr [ilkhobo@sun.ac.za]" userId="b519a442-dcea-4a28-9c45-7e29f1df5837" providerId="ADAL" clId="{8BC8A5CF-2DB3-45E9-BF57-F2ED810C291E}" dt="2026-09-17T18:50:35.140" v="3212" actId="22"/>
-          <ac:spMkLst>
-            <pc:docMk/>
-            <pc:sldMk cId="3773195825" sldId="602"/>
-            <ac:spMk id="13" creationId="{D584A258-DA0C-E816-0E85-F65634308344}"/>
-          </ac:spMkLst>
-        </pc:spChg>
         <pc:spChg chg="mod">
           <ac:chgData name="Khobo, IL, Dr [ilkhobo@sun.ac.za]" userId="b519a442-dcea-4a28-9c45-7e29f1df5837" providerId="ADAL" clId="{8BC8A5CF-2DB3-45E9-BF57-F2ED810C291E}" dt="2026-09-17T18:58:15.168" v="3266" actId="1076"/>
           <ac:spMkLst>
             <pc:docMk/>
             <pc:sldMk cId="3773195825" sldId="602"/>
             <ac:spMk id="14" creationId="{B9B3E272-D739-6521-51EC-505C39E02CDD}"/>
-          </ac:spMkLst>
-        </pc:spChg>
-        <pc:spChg chg="del mod">
-          <ac:chgData name="Khobo, IL, Dr [ilkhobo@sun.ac.za]" userId="b519a442-dcea-4a28-9c45-7e29f1df5837" providerId="ADAL" clId="{8BC8A5CF-2DB3-45E9-BF57-F2ED810C291E}" dt="2026-09-17T18:49:47.211" v="3203" actId="478"/>
-          <ac:spMkLst>
-            <pc:docMk/>
-            <pc:sldMk cId="3773195825" sldId="602"/>
-            <ac:spMk id="16" creationId="{48224128-C60C-486B-3024-988F776E3214}"/>
-          </ac:spMkLst>
-        </pc:spChg>
-        <pc:spChg chg="add del">
-          <ac:chgData name="Khobo, IL, Dr [ilkhobo@sun.ac.za]" userId="b519a442-dcea-4a28-9c45-7e29f1df5837" providerId="ADAL" clId="{8BC8A5CF-2DB3-45E9-BF57-F2ED810C291E}" dt="2026-09-17T18:50:35.140" v="3212" actId="22"/>
-          <ac:spMkLst>
-            <pc:docMk/>
-            <pc:sldMk cId="3773195825" sldId="602"/>
-            <ac:spMk id="17" creationId="{EE462A05-E35A-0CC9-6B13-EFA429FACD6D}"/>
-          </ac:spMkLst>
-        </pc:spChg>
-        <pc:spChg chg="del mod">
-          <ac:chgData name="Khobo, IL, Dr [ilkhobo@sun.ac.za]" userId="b519a442-dcea-4a28-9c45-7e29f1df5837" providerId="ADAL" clId="{8BC8A5CF-2DB3-45E9-BF57-F2ED810C291E}" dt="2026-09-17T18:49:35.452" v="3202"/>
-          <ac:spMkLst>
-            <pc:docMk/>
-            <pc:sldMk cId="3773195825" sldId="602"/>
-            <ac:spMk id="18" creationId="{1492ECDF-535D-2237-DE57-DD9E66F086D7}"/>
-          </ac:spMkLst>
-        </pc:spChg>
-        <pc:spChg chg="del">
-          <ac:chgData name="Khobo, IL, Dr [ilkhobo@sun.ac.za]" userId="b519a442-dcea-4a28-9c45-7e29f1df5837" providerId="ADAL" clId="{8BC8A5CF-2DB3-45E9-BF57-F2ED810C291E}" dt="2026-09-17T18:49:47.211" v="3203" actId="478"/>
-          <ac:spMkLst>
-            <pc:docMk/>
-            <pc:sldMk cId="3773195825" sldId="602"/>
-            <ac:spMk id="20" creationId="{AE8492C5-194A-6DEB-B1FD-2850D8B74398}"/>
-          </ac:spMkLst>
-        </pc:spChg>
-        <pc:spChg chg="add del">
-          <ac:chgData name="Khobo, IL, Dr [ilkhobo@sun.ac.za]" userId="b519a442-dcea-4a28-9c45-7e29f1df5837" providerId="ADAL" clId="{8BC8A5CF-2DB3-45E9-BF57-F2ED810C291E}" dt="2026-09-17T18:50:35.140" v="3212" actId="22"/>
-          <ac:spMkLst>
-            <pc:docMk/>
-            <pc:sldMk cId="3773195825" sldId="602"/>
-            <ac:spMk id="21" creationId="{0CF9BBDB-88A7-1677-D769-A104BB48E055}"/>
-          </ac:spMkLst>
-        </pc:spChg>
-        <pc:spChg chg="add del">
-          <ac:chgData name="Khobo, IL, Dr [ilkhobo@sun.ac.za]" userId="b519a442-dcea-4a28-9c45-7e29f1df5837" providerId="ADAL" clId="{8BC8A5CF-2DB3-45E9-BF57-F2ED810C291E}" dt="2026-09-17T18:50:35.140" v="3212" actId="22"/>
-          <ac:spMkLst>
-            <pc:docMk/>
-            <pc:sldMk cId="3773195825" sldId="602"/>
-            <ac:spMk id="23" creationId="{D933F4C1-E564-847E-7E50-A514F5D6ABB1}"/>
           </ac:spMkLst>
         </pc:spChg>
         <pc:picChg chg="add mod">
@@ -771,7 +491,7 @@
         </pc:picChg>
       </pc:sldChg>
       <pc:sldChg chg="addSp delSp modSp add mod modTransition">
-        <pc:chgData name="Khobo, IL, Dr [ilkhobo@sun.ac.za]" userId="b519a442-dcea-4a28-9c45-7e29f1df5837" providerId="ADAL" clId="{8BC8A5CF-2DB3-45E9-BF57-F2ED810C291E}" dt="2026-09-18T08:08:07.166" v="3903" actId="478"/>
+        <pc:chgData name="Khobo, IL, Dr [ilkhobo@sun.ac.za]" userId="b519a442-dcea-4a28-9c45-7e29f1df5837" providerId="ADAL" clId="{8BC8A5CF-2DB3-45E9-BF57-F2ED810C291E}" dt="2026-09-19T09:29:57.329" v="3940" actId="20577"/>
         <pc:sldMkLst>
           <pc:docMk/>
           <pc:sldMk cId="1555217230" sldId="603"/>
@@ -793,7 +513,7 @@
           </ac:spMkLst>
         </pc:spChg>
         <pc:spChg chg="mod">
-          <ac:chgData name="Khobo, IL, Dr [ilkhobo@sun.ac.za]" userId="b519a442-dcea-4a28-9c45-7e29f1df5837" providerId="ADAL" clId="{8BC8A5CF-2DB3-45E9-BF57-F2ED810C291E}" dt="2026-09-17T18:58:25.220" v="3267" actId="1076"/>
+          <ac:chgData name="Khobo, IL, Dr [ilkhobo@sun.ac.za]" userId="b519a442-dcea-4a28-9c45-7e29f1df5837" providerId="ADAL" clId="{8BC8A5CF-2DB3-45E9-BF57-F2ED810C291E}" dt="2026-09-19T09:29:57.329" v="3940" actId="20577"/>
           <ac:spMkLst>
             <pc:docMk/>
             <pc:sldMk cId="1555217230" sldId="603"/>
@@ -849,121 +569,18 @@
           </ac:inkMkLst>
         </pc:inkChg>
       </pc:sldChg>
-      <pc:sldChg chg="addSp delSp modSp new del mod">
-        <pc:chgData name="Khobo, IL, Dr [ilkhobo@sun.ac.za]" userId="b519a442-dcea-4a28-9c45-7e29f1df5837" providerId="ADAL" clId="{8BC8A5CF-2DB3-45E9-BF57-F2ED810C291E}" dt="2026-09-17T18:57:00.872" v="3260" actId="2696"/>
-        <pc:sldMkLst>
-          <pc:docMk/>
-          <pc:sldMk cId="776802664" sldId="604"/>
-        </pc:sldMkLst>
-        <pc:spChg chg="del">
-          <ac:chgData name="Khobo, IL, Dr [ilkhobo@sun.ac.za]" userId="b519a442-dcea-4a28-9c45-7e29f1df5837" providerId="ADAL" clId="{8BC8A5CF-2DB3-45E9-BF57-F2ED810C291E}" dt="2026-09-17T18:55:31.185" v="3241" actId="478"/>
-          <ac:spMkLst>
-            <pc:docMk/>
-            <pc:sldMk cId="776802664" sldId="604"/>
-            <ac:spMk id="2" creationId="{FF3C8BCE-A140-B5FC-85D6-1198989B15F4}"/>
-          </ac:spMkLst>
-        </pc:spChg>
-        <pc:spChg chg="del">
-          <ac:chgData name="Khobo, IL, Dr [ilkhobo@sun.ac.za]" userId="b519a442-dcea-4a28-9c45-7e29f1df5837" providerId="ADAL" clId="{8BC8A5CF-2DB3-45E9-BF57-F2ED810C291E}" dt="2026-09-17T18:55:31.185" v="3241" actId="478"/>
-          <ac:spMkLst>
-            <pc:docMk/>
-            <pc:sldMk cId="776802664" sldId="604"/>
-            <ac:spMk id="3" creationId="{BAE9A858-F8B8-26E5-E764-BDCC32356EFC}"/>
-          </ac:spMkLst>
-        </pc:spChg>
-        <pc:picChg chg="add del">
-          <ac:chgData name="Khobo, IL, Dr [ilkhobo@sun.ac.za]" userId="b519a442-dcea-4a28-9c45-7e29f1df5837" providerId="ADAL" clId="{8BC8A5CF-2DB3-45E9-BF57-F2ED810C291E}" dt="2026-09-17T18:55:28.872" v="3240" actId="22"/>
-          <ac:picMkLst>
-            <pc:docMk/>
-            <pc:sldMk cId="776802664" sldId="604"/>
-            <ac:picMk id="5" creationId="{B4982D5B-F040-4E0D-0164-6C06CE81BB61}"/>
-          </ac:picMkLst>
-        </pc:picChg>
-        <pc:picChg chg="add mod">
-          <ac:chgData name="Khobo, IL, Dr [ilkhobo@sun.ac.za]" userId="b519a442-dcea-4a28-9c45-7e29f1df5837" providerId="ADAL" clId="{8BC8A5CF-2DB3-45E9-BF57-F2ED810C291E}" dt="2026-09-17T18:55:46.951" v="3249" actId="14100"/>
-          <ac:picMkLst>
-            <pc:docMk/>
-            <pc:sldMk cId="776802664" sldId="604"/>
-            <ac:picMk id="7" creationId="{AA706EFE-7D71-C79E-40D0-22369B41128A}"/>
-          </ac:picMkLst>
-        </pc:picChg>
-      </pc:sldChg>
       <pc:sldChg chg="addSp delSp modSp add mod">
         <pc:chgData name="Khobo, IL, Dr [ilkhobo@sun.ac.za]" userId="b519a442-dcea-4a28-9c45-7e29f1df5837" providerId="ADAL" clId="{8BC8A5CF-2DB3-45E9-BF57-F2ED810C291E}" dt="2026-09-18T08:08:13.105" v="3904" actId="478"/>
         <pc:sldMkLst>
           <pc:docMk/>
           <pc:sldMk cId="3827995093" sldId="604"/>
         </pc:sldMkLst>
-        <pc:spChg chg="del">
-          <ac:chgData name="Khobo, IL, Dr [ilkhobo@sun.ac.za]" userId="b519a442-dcea-4a28-9c45-7e29f1df5837" providerId="ADAL" clId="{8BC8A5CF-2DB3-45E9-BF57-F2ED810C291E}" dt="2026-09-17T19:07:47.341" v="3299" actId="478"/>
-          <ac:spMkLst>
-            <pc:docMk/>
-            <pc:sldMk cId="3827995093" sldId="604"/>
-            <ac:spMk id="3" creationId="{B5AF49AA-1495-0BA2-91A4-DB3A99DE7E91}"/>
-          </ac:spMkLst>
-        </pc:spChg>
-        <pc:spChg chg="del">
-          <ac:chgData name="Khobo, IL, Dr [ilkhobo@sun.ac.za]" userId="b519a442-dcea-4a28-9c45-7e29f1df5837" providerId="ADAL" clId="{8BC8A5CF-2DB3-45E9-BF57-F2ED810C291E}" dt="2026-09-17T19:07:47.341" v="3299" actId="478"/>
-          <ac:spMkLst>
-            <pc:docMk/>
-            <pc:sldMk cId="3827995093" sldId="604"/>
-            <ac:spMk id="4" creationId="{5732D496-CE54-F252-B9F8-F4DE10BBB43B}"/>
-          </ac:spMkLst>
-        </pc:spChg>
-        <pc:spChg chg="del">
-          <ac:chgData name="Khobo, IL, Dr [ilkhobo@sun.ac.za]" userId="b519a442-dcea-4a28-9c45-7e29f1df5837" providerId="ADAL" clId="{8BC8A5CF-2DB3-45E9-BF57-F2ED810C291E}" dt="2026-09-17T19:07:50.746" v="3300" actId="478"/>
-          <ac:spMkLst>
-            <pc:docMk/>
-            <pc:sldMk cId="3827995093" sldId="604"/>
-            <ac:spMk id="6" creationId="{9A6DCF91-D6F2-E548-CC80-74411C0EF751}"/>
-          </ac:spMkLst>
-        </pc:spChg>
-        <pc:spChg chg="del">
-          <ac:chgData name="Khobo, IL, Dr [ilkhobo@sun.ac.za]" userId="b519a442-dcea-4a28-9c45-7e29f1df5837" providerId="ADAL" clId="{8BC8A5CF-2DB3-45E9-BF57-F2ED810C291E}" dt="2026-09-17T19:07:47.341" v="3299" actId="478"/>
-          <ac:spMkLst>
-            <pc:docMk/>
-            <pc:sldMk cId="3827995093" sldId="604"/>
-            <ac:spMk id="8" creationId="{88B3E06C-1CA7-A74A-64EB-F905C51A82F1}"/>
-          </ac:spMkLst>
-        </pc:spChg>
-        <pc:spChg chg="del">
-          <ac:chgData name="Khobo, IL, Dr [ilkhobo@sun.ac.za]" userId="b519a442-dcea-4a28-9c45-7e29f1df5837" providerId="ADAL" clId="{8BC8A5CF-2DB3-45E9-BF57-F2ED810C291E}" dt="2026-09-17T19:07:47.341" v="3299" actId="478"/>
-          <ac:spMkLst>
-            <pc:docMk/>
-            <pc:sldMk cId="3827995093" sldId="604"/>
-            <ac:spMk id="10" creationId="{F91A5E34-C17D-44AB-2D0B-CEFCE2947648}"/>
-          </ac:spMkLst>
-        </pc:spChg>
-        <pc:spChg chg="del">
-          <ac:chgData name="Khobo, IL, Dr [ilkhobo@sun.ac.za]" userId="b519a442-dcea-4a28-9c45-7e29f1df5837" providerId="ADAL" clId="{8BC8A5CF-2DB3-45E9-BF57-F2ED810C291E}" dt="2026-09-17T19:07:47.341" v="3299" actId="478"/>
-          <ac:spMkLst>
-            <pc:docMk/>
-            <pc:sldMk cId="3827995093" sldId="604"/>
-            <ac:spMk id="12" creationId="{33DEDC35-0B9E-458D-F5CC-26919B14F460}"/>
-          </ac:spMkLst>
-        </pc:spChg>
-        <pc:spChg chg="del">
-          <ac:chgData name="Khobo, IL, Dr [ilkhobo@sun.ac.za]" userId="b519a442-dcea-4a28-9c45-7e29f1df5837" providerId="ADAL" clId="{8BC8A5CF-2DB3-45E9-BF57-F2ED810C291E}" dt="2026-09-17T19:07:50.746" v="3300" actId="478"/>
-          <ac:spMkLst>
-            <pc:docMk/>
-            <pc:sldMk cId="3827995093" sldId="604"/>
-            <ac:spMk id="14" creationId="{272FBCF8-B3E3-E390-F2DE-F68DF983B582}"/>
-          </ac:spMkLst>
-        </pc:spChg>
         <pc:picChg chg="add mod">
           <ac:chgData name="Khobo, IL, Dr [ilkhobo@sun.ac.za]" userId="b519a442-dcea-4a28-9c45-7e29f1df5837" providerId="ADAL" clId="{8BC8A5CF-2DB3-45E9-BF57-F2ED810C291E}" dt="2026-09-17T19:08:01.302" v="3306" actId="1076"/>
           <ac:picMkLst>
             <pc:docMk/>
             <pc:sldMk cId="3827995093" sldId="604"/>
             <ac:picMk id="5" creationId="{3870811C-E024-846D-99D0-77054D43A021}"/>
-          </ac:picMkLst>
-        </pc:picChg>
-        <pc:picChg chg="del">
-          <ac:chgData name="Khobo, IL, Dr [ilkhobo@sun.ac.za]" userId="b519a442-dcea-4a28-9c45-7e29f1df5837" providerId="ADAL" clId="{8BC8A5CF-2DB3-45E9-BF57-F2ED810C291E}" dt="2026-09-17T19:07:47.341" v="3299" actId="478"/>
-          <ac:picMkLst>
-            <pc:docMk/>
-            <pc:sldMk cId="3827995093" sldId="604"/>
-            <ac:picMk id="7" creationId="{ACFE1A3E-B7AD-3168-045E-F2F306220CC4}"/>
           </ac:picMkLst>
         </pc:picChg>
         <pc:inkChg chg="add del">
@@ -975,51 +592,12 @@
           </ac:inkMkLst>
         </pc:inkChg>
       </pc:sldChg>
-      <pc:sldChg chg="delSp new del mod">
-        <pc:chgData name="Khobo, IL, Dr [ilkhobo@sun.ac.za]" userId="b519a442-dcea-4a28-9c45-7e29f1df5837" providerId="ADAL" clId="{8BC8A5CF-2DB3-45E9-BF57-F2ED810C291E}" dt="2026-09-17T19:13:38.758" v="3309" actId="2696"/>
-        <pc:sldMkLst>
-          <pc:docMk/>
-          <pc:sldMk cId="1981044643" sldId="605"/>
-        </pc:sldMkLst>
-        <pc:spChg chg="del">
-          <ac:chgData name="Khobo, IL, Dr [ilkhobo@sun.ac.za]" userId="b519a442-dcea-4a28-9c45-7e29f1df5837" providerId="ADAL" clId="{8BC8A5CF-2DB3-45E9-BF57-F2ED810C291E}" dt="2026-09-17T19:13:34.160" v="3308" actId="478"/>
-          <ac:spMkLst>
-            <pc:docMk/>
-            <pc:sldMk cId="1981044643" sldId="605"/>
-            <ac:spMk id="2" creationId="{41D40D48-EE46-8C6D-FC51-D5BBE9BD6ABC}"/>
-          </ac:spMkLst>
-        </pc:spChg>
-        <pc:spChg chg="del">
-          <ac:chgData name="Khobo, IL, Dr [ilkhobo@sun.ac.za]" userId="b519a442-dcea-4a28-9c45-7e29f1df5837" providerId="ADAL" clId="{8BC8A5CF-2DB3-45E9-BF57-F2ED810C291E}" dt="2026-09-17T19:13:34.160" v="3308" actId="478"/>
-          <ac:spMkLst>
-            <pc:docMk/>
-            <pc:sldMk cId="1981044643" sldId="605"/>
-            <ac:spMk id="3" creationId="{D7BC356D-93B5-B7ED-1B58-84EDD6CDD15A}"/>
-          </ac:spMkLst>
-        </pc:spChg>
-      </pc:sldChg>
       <pc:sldChg chg="addSp delSp modSp add mod modTransition modAnim">
         <pc:chgData name="Khobo, IL, Dr [ilkhobo@sun.ac.za]" userId="b519a442-dcea-4a28-9c45-7e29f1df5837" providerId="ADAL" clId="{8BC8A5CF-2DB3-45E9-BF57-F2ED810C291E}" dt="2026-09-18T08:08:19.147" v="3905" actId="478"/>
         <pc:sldMkLst>
           <pc:docMk/>
           <pc:sldMk cId="2928003494" sldId="605"/>
         </pc:sldMkLst>
-        <pc:spChg chg="add del mod">
-          <ac:chgData name="Khobo, IL, Dr [ilkhobo@sun.ac.za]" userId="b519a442-dcea-4a28-9c45-7e29f1df5837" providerId="ADAL" clId="{8BC8A5CF-2DB3-45E9-BF57-F2ED810C291E}" dt="2026-09-17T19:14:08.279" v="3337" actId="478"/>
-          <ac:spMkLst>
-            <pc:docMk/>
-            <pc:sldMk cId="2928003494" sldId="605"/>
-            <ac:spMk id="2" creationId="{C8FD51DD-3990-1C4A-4BDB-D338865F7381}"/>
-          </ac:spMkLst>
-        </pc:spChg>
-        <pc:spChg chg="add del mod">
-          <ac:chgData name="Khobo, IL, Dr [ilkhobo@sun.ac.za]" userId="b519a442-dcea-4a28-9c45-7e29f1df5837" providerId="ADAL" clId="{8BC8A5CF-2DB3-45E9-BF57-F2ED810C291E}" dt="2026-09-17T19:22:24.259" v="3363"/>
-          <ac:spMkLst>
-            <pc:docMk/>
-            <pc:sldMk cId="2928003494" sldId="605"/>
-            <ac:spMk id="12" creationId="{D35CF8E5-8F25-1BD1-CC3D-1F763575B2C7}"/>
-          </ac:spMkLst>
-        </pc:spChg>
         <pc:spChg chg="add mod">
           <ac:chgData name="Khobo, IL, Dr [ilkhobo@sun.ac.za]" userId="b519a442-dcea-4a28-9c45-7e29f1df5837" providerId="ADAL" clId="{8BC8A5CF-2DB3-45E9-BF57-F2ED810C291E}" dt="2026-09-17T19:23:09.587" v="3416" actId="1076"/>
           <ac:spMkLst>
@@ -1060,22 +638,6 @@
             <ac:spMk id="36" creationId="{076E723C-096D-5A5D-FA4F-A3C4A3AD0AC8}"/>
           </ac:spMkLst>
         </pc:spChg>
-        <pc:picChg chg="add del mod">
-          <ac:chgData name="Khobo, IL, Dr [ilkhobo@sun.ac.za]" userId="b519a442-dcea-4a28-9c45-7e29f1df5837" providerId="ADAL" clId="{8BC8A5CF-2DB3-45E9-BF57-F2ED810C291E}" dt="2026-09-17T19:18:44.733" v="3340" actId="478"/>
-          <ac:picMkLst>
-            <pc:docMk/>
-            <pc:sldMk cId="2928003494" sldId="605"/>
-            <ac:picMk id="4" creationId="{F0AC2980-1199-7B6D-8271-2DC07CA10B40}"/>
-          </ac:picMkLst>
-        </pc:picChg>
-        <pc:picChg chg="del">
-          <ac:chgData name="Khobo, IL, Dr [ilkhobo@sun.ac.za]" userId="b519a442-dcea-4a28-9c45-7e29f1df5837" providerId="ADAL" clId="{8BC8A5CF-2DB3-45E9-BF57-F2ED810C291E}" dt="2026-09-17T19:13:48.719" v="3312" actId="478"/>
-          <ac:picMkLst>
-            <pc:docMk/>
-            <pc:sldMk cId="2928003494" sldId="605"/>
-            <ac:picMk id="5" creationId="{4468CA2F-591B-3AB5-203D-5B5C6F43AF0B}"/>
-          </ac:picMkLst>
-        </pc:picChg>
         <pc:picChg chg="add mod">
           <ac:chgData name="Khobo, IL, Dr [ilkhobo@sun.ac.za]" userId="b519a442-dcea-4a28-9c45-7e29f1df5837" providerId="ADAL" clId="{8BC8A5CF-2DB3-45E9-BF57-F2ED810C291E}" dt="2026-09-17T19:22:00.184" v="3361" actId="1076"/>
           <ac:picMkLst>
@@ -1109,29 +671,6 @@
           </ac:inkMkLst>
         </pc:inkChg>
       </pc:sldChg>
-      <pc:sldChg chg="delSp new add del mod">
-        <pc:chgData name="Khobo, IL, Dr [ilkhobo@sun.ac.za]" userId="b519a442-dcea-4a28-9c45-7e29f1df5837" providerId="ADAL" clId="{8BC8A5CF-2DB3-45E9-BF57-F2ED810C291E}" dt="2026-09-17T18:56:58.142" v="3259" actId="2696"/>
-        <pc:sldMkLst>
-          <pc:docMk/>
-          <pc:sldMk cId="3581699958" sldId="605"/>
-        </pc:sldMkLst>
-        <pc:spChg chg="del">
-          <ac:chgData name="Khobo, IL, Dr [ilkhobo@sun.ac.za]" userId="b519a442-dcea-4a28-9c45-7e29f1df5837" providerId="ADAL" clId="{8BC8A5CF-2DB3-45E9-BF57-F2ED810C291E}" dt="2026-09-17T18:56:24.935" v="3256" actId="478"/>
-          <ac:spMkLst>
-            <pc:docMk/>
-            <pc:sldMk cId="3581699958" sldId="605"/>
-            <ac:spMk id="2" creationId="{DC210F79-0BEC-2275-BA68-BCCF39F2A973}"/>
-          </ac:spMkLst>
-        </pc:spChg>
-        <pc:spChg chg="del">
-          <ac:chgData name="Khobo, IL, Dr [ilkhobo@sun.ac.za]" userId="b519a442-dcea-4a28-9c45-7e29f1df5837" providerId="ADAL" clId="{8BC8A5CF-2DB3-45E9-BF57-F2ED810C291E}" dt="2026-09-17T18:56:24.935" v="3256" actId="478"/>
-          <ac:spMkLst>
-            <pc:docMk/>
-            <pc:sldMk cId="3581699958" sldId="605"/>
-            <ac:spMk id="3" creationId="{D1D8A9C1-8029-632B-0BE1-B464AA497BE5}"/>
-          </ac:spMkLst>
-        </pc:spChg>
-      </pc:sldChg>
       <pc:sldChg chg="addSp delSp modSp add mod delAnim">
         <pc:chgData name="Khobo, IL, Dr [ilkhobo@sun.ac.za]" userId="b519a442-dcea-4a28-9c45-7e29f1df5837" providerId="ADAL" clId="{8BC8A5CF-2DB3-45E9-BF57-F2ED810C291E}" dt="2026-09-18T08:08:22.897" v="3906" actId="478"/>
         <pc:sldMkLst>
@@ -1154,36 +693,12 @@
             <ac:picMk id="5" creationId="{410576D7-CF62-805A-733A-89622370E250}"/>
           </ac:picMkLst>
         </pc:picChg>
-        <pc:picChg chg="del">
-          <ac:chgData name="Khobo, IL, Dr [ilkhobo@sun.ac.za]" userId="b519a442-dcea-4a28-9c45-7e29f1df5837" providerId="ADAL" clId="{8BC8A5CF-2DB3-45E9-BF57-F2ED810C291E}" dt="2026-09-17T19:25:38.200" v="3424" actId="478"/>
-          <ac:picMkLst>
-            <pc:docMk/>
-            <pc:sldMk cId="113253452" sldId="606"/>
-            <ac:picMk id="7" creationId="{C51AFB0E-E675-0252-D525-234FE411E18A}"/>
-          </ac:picMkLst>
-        </pc:picChg>
         <pc:picChg chg="add mod">
           <ac:chgData name="Khobo, IL, Dr [ilkhobo@sun.ac.za]" userId="b519a442-dcea-4a28-9c45-7e29f1df5837" providerId="ADAL" clId="{8BC8A5CF-2DB3-45E9-BF57-F2ED810C291E}" dt="2026-09-17T19:27:03.671" v="3436" actId="1076"/>
           <ac:picMkLst>
             <pc:docMk/>
             <pc:sldMk cId="113253452" sldId="606"/>
             <ac:picMk id="8" creationId="{809A9652-18C6-45AE-6174-74715E8DA357}"/>
-          </ac:picMkLst>
-        </pc:picChg>
-        <pc:picChg chg="del">
-          <ac:chgData name="Khobo, IL, Dr [ilkhobo@sun.ac.za]" userId="b519a442-dcea-4a28-9c45-7e29f1df5837" providerId="ADAL" clId="{8BC8A5CF-2DB3-45E9-BF57-F2ED810C291E}" dt="2026-09-17T19:26:08.745" v="3428" actId="478"/>
-          <ac:picMkLst>
-            <pc:docMk/>
-            <pc:sldMk cId="113253452" sldId="606"/>
-            <ac:picMk id="9" creationId="{1F6E96BF-C26F-5F8E-A364-D85B76F5A78D}"/>
-          </ac:picMkLst>
-        </pc:picChg>
-        <pc:picChg chg="del">
-          <ac:chgData name="Khobo, IL, Dr [ilkhobo@sun.ac.za]" userId="b519a442-dcea-4a28-9c45-7e29f1df5837" providerId="ADAL" clId="{8BC8A5CF-2DB3-45E9-BF57-F2ED810C291E}" dt="2026-09-17T19:26:06.645" v="3427" actId="478"/>
-          <ac:picMkLst>
-            <pc:docMk/>
-            <pc:sldMk cId="113253452" sldId="606"/>
-            <ac:picMk id="11" creationId="{D30A5D96-BA4F-4A5C-D9CD-00D69D9052A7}"/>
           </ac:picMkLst>
         </pc:picChg>
         <pc:inkChg chg="add del">
@@ -1201,14 +716,6 @@
           <pc:docMk/>
           <pc:sldMk cId="2768339207" sldId="607"/>
         </pc:sldMkLst>
-        <pc:spChg chg="del">
-          <ac:chgData name="Khobo, IL, Dr [ilkhobo@sun.ac.za]" userId="b519a442-dcea-4a28-9c45-7e29f1df5837" providerId="ADAL" clId="{8BC8A5CF-2DB3-45E9-BF57-F2ED810C291E}" dt="2026-09-17T19:37:30.509" v="3440" actId="478"/>
-          <ac:spMkLst>
-            <pc:docMk/>
-            <pc:sldMk cId="2768339207" sldId="607"/>
-            <ac:spMk id="3" creationId="{3F2A9AAF-CB86-E60A-3979-43A8BBCCD23D}"/>
-          </ac:spMkLst>
-        </pc:spChg>
         <pc:spChg chg="add mod">
           <ac:chgData name="Khobo, IL, Dr [ilkhobo@sun.ac.za]" userId="b519a442-dcea-4a28-9c45-7e29f1df5837" providerId="ADAL" clId="{8BC8A5CF-2DB3-45E9-BF57-F2ED810C291E}" dt="2026-09-17T19:39:45.363" v="3514" actId="1076"/>
           <ac:spMkLst>
@@ -1233,28 +740,12 @@
             <ac:picMk id="4" creationId="{E073F583-6D12-AAC6-60CC-886BDFF0B1EA}"/>
           </ac:picMkLst>
         </pc:picChg>
-        <pc:picChg chg="del">
-          <ac:chgData name="Khobo, IL, Dr [ilkhobo@sun.ac.za]" userId="b519a442-dcea-4a28-9c45-7e29f1df5837" providerId="ADAL" clId="{8BC8A5CF-2DB3-45E9-BF57-F2ED810C291E}" dt="2026-09-17T19:37:24.159" v="3438" actId="478"/>
-          <ac:picMkLst>
-            <pc:docMk/>
-            <pc:sldMk cId="2768339207" sldId="607"/>
-            <ac:picMk id="5" creationId="{DFC5EABC-6E31-A04E-6B51-B700A4837C09}"/>
-          </ac:picMkLst>
-        </pc:picChg>
         <pc:picChg chg="add mod">
           <ac:chgData name="Khobo, IL, Dr [ilkhobo@sun.ac.za]" userId="b519a442-dcea-4a28-9c45-7e29f1df5837" providerId="ADAL" clId="{8BC8A5CF-2DB3-45E9-BF57-F2ED810C291E}" dt="2026-09-17T19:38:38.688" v="3449" actId="1076"/>
           <ac:picMkLst>
             <pc:docMk/>
             <pc:sldMk cId="2768339207" sldId="607"/>
             <ac:picMk id="7" creationId="{8B1C275E-E8A6-35F7-5ACB-6D889B2378B2}"/>
-          </ac:picMkLst>
-        </pc:picChg>
-        <pc:picChg chg="del">
-          <ac:chgData name="Khobo, IL, Dr [ilkhobo@sun.ac.za]" userId="b519a442-dcea-4a28-9c45-7e29f1df5837" providerId="ADAL" clId="{8BC8A5CF-2DB3-45E9-BF57-F2ED810C291E}" dt="2026-09-17T19:37:25.985" v="3439" actId="478"/>
-          <ac:picMkLst>
-            <pc:docMk/>
-            <pc:sldMk cId="2768339207" sldId="607"/>
-            <ac:picMk id="8" creationId="{BB97E7B8-5032-2D5B-99A0-1A406E8E7885}"/>
           </ac:picMkLst>
         </pc:picChg>
         <pc:inkChg chg="add del">
@@ -1304,36 +795,12 @@
             <ac:spMk id="14" creationId="{971754DC-A567-16A4-F138-D499A1E46B4F}"/>
           </ac:spMkLst>
         </pc:spChg>
-        <pc:picChg chg="del">
-          <ac:chgData name="Khobo, IL, Dr [ilkhobo@sun.ac.za]" userId="b519a442-dcea-4a28-9c45-7e29f1df5837" providerId="ADAL" clId="{8BC8A5CF-2DB3-45E9-BF57-F2ED810C291E}" dt="2026-09-17T19:42:44.575" v="3527" actId="478"/>
-          <ac:picMkLst>
-            <pc:docMk/>
-            <pc:sldMk cId="2304259686" sldId="608"/>
-            <ac:picMk id="2" creationId="{4064D69F-A469-FA57-2ED4-CBCD6953B834}"/>
-          </ac:picMkLst>
-        </pc:picChg>
-        <pc:picChg chg="del">
-          <ac:chgData name="Khobo, IL, Dr [ilkhobo@sun.ac.za]" userId="b519a442-dcea-4a28-9c45-7e29f1df5837" providerId="ADAL" clId="{8BC8A5CF-2DB3-45E9-BF57-F2ED810C291E}" dt="2026-09-17T19:42:44.575" v="3527" actId="478"/>
-          <ac:picMkLst>
-            <pc:docMk/>
-            <pc:sldMk cId="2304259686" sldId="608"/>
-            <ac:picMk id="4" creationId="{233A3B53-14CB-548E-D310-5E111C11856B}"/>
-          </ac:picMkLst>
-        </pc:picChg>
         <pc:picChg chg="add mod">
           <ac:chgData name="Khobo, IL, Dr [ilkhobo@sun.ac.za]" userId="b519a442-dcea-4a28-9c45-7e29f1df5837" providerId="ADAL" clId="{8BC8A5CF-2DB3-45E9-BF57-F2ED810C291E}" dt="2026-09-17T19:47:01.374" v="3534" actId="14100"/>
           <ac:picMkLst>
             <pc:docMk/>
             <pc:sldMk cId="2304259686" sldId="608"/>
             <ac:picMk id="5" creationId="{CFF4D558-5D83-C60B-78ED-55A81CCFF12B}"/>
-          </ac:picMkLst>
-        </pc:picChg>
-        <pc:picChg chg="del">
-          <ac:chgData name="Khobo, IL, Dr [ilkhobo@sun.ac.za]" userId="b519a442-dcea-4a28-9c45-7e29f1df5837" providerId="ADAL" clId="{8BC8A5CF-2DB3-45E9-BF57-F2ED810C291E}" dt="2026-09-17T19:42:44.575" v="3527" actId="478"/>
-          <ac:picMkLst>
-            <pc:docMk/>
-            <pc:sldMk cId="2304259686" sldId="608"/>
-            <ac:picMk id="7" creationId="{C7F617FC-9999-5A72-CD21-2706E049F7F6}"/>
           </ac:picMkLst>
         </pc:picChg>
         <pc:picChg chg="add mod">
@@ -1360,14 +827,6 @@
             <ac:inkMk id="17" creationId="{0442BDE7-42B2-F270-B28A-BF8F7651C1AD}"/>
           </ac:inkMkLst>
         </pc:inkChg>
-        <pc:cxnChg chg="del">
-          <ac:chgData name="Khobo, IL, Dr [ilkhobo@sun.ac.za]" userId="b519a442-dcea-4a28-9c45-7e29f1df5837" providerId="ADAL" clId="{8BC8A5CF-2DB3-45E9-BF57-F2ED810C291E}" dt="2026-09-17T19:42:46.627" v="3528" actId="478"/>
-          <ac:cxnSpMkLst>
-            <pc:docMk/>
-            <pc:sldMk cId="2304259686" sldId="608"/>
-            <ac:cxnSpMk id="6" creationId="{00E1D713-A676-5C9F-C639-386EFA8565DD}"/>
-          </ac:cxnSpMkLst>
-        </pc:cxnChg>
         <pc:cxnChg chg="add mod">
           <ac:chgData name="Khobo, IL, Dr [ilkhobo@sun.ac.za]" userId="b519a442-dcea-4a28-9c45-7e29f1df5837" providerId="ADAL" clId="{8BC8A5CF-2DB3-45E9-BF57-F2ED810C291E}" dt="2026-09-17T19:47:52.357" v="3543" actId="1076"/>
           <ac:cxnSpMkLst>
@@ -1389,30 +848,6 @@
             <pc:docMk/>
             <pc:sldMk cId="506110610" sldId="609"/>
             <ac:spMk id="3" creationId="{FD9E8BF4-4932-F61B-88C8-9258FBBE672B}"/>
-          </ac:spMkLst>
-        </pc:spChg>
-        <pc:spChg chg="del">
-          <ac:chgData name="Khobo, IL, Dr [ilkhobo@sun.ac.za]" userId="b519a442-dcea-4a28-9c45-7e29f1df5837" providerId="ADAL" clId="{8BC8A5CF-2DB3-45E9-BF57-F2ED810C291E}" dt="2026-09-17T19:54:43.890" v="3566" actId="478"/>
-          <ac:spMkLst>
-            <pc:docMk/>
-            <pc:sldMk cId="506110610" sldId="609"/>
-            <ac:spMk id="10" creationId="{CF1E8530-DC79-3713-EEBA-8D2B88AFFCAC}"/>
-          </ac:spMkLst>
-        </pc:spChg>
-        <pc:spChg chg="del">
-          <ac:chgData name="Khobo, IL, Dr [ilkhobo@sun.ac.za]" userId="b519a442-dcea-4a28-9c45-7e29f1df5837" providerId="ADAL" clId="{8BC8A5CF-2DB3-45E9-BF57-F2ED810C291E}" dt="2026-09-17T19:54:43.890" v="3566" actId="478"/>
-          <ac:spMkLst>
-            <pc:docMk/>
-            <pc:sldMk cId="506110610" sldId="609"/>
-            <ac:spMk id="12" creationId="{CA7EEDEE-0808-4566-8352-9C04D9599CEE}"/>
-          </ac:spMkLst>
-        </pc:spChg>
-        <pc:spChg chg="del">
-          <ac:chgData name="Khobo, IL, Dr [ilkhobo@sun.ac.za]" userId="b519a442-dcea-4a28-9c45-7e29f1df5837" providerId="ADAL" clId="{8BC8A5CF-2DB3-45E9-BF57-F2ED810C291E}" dt="2026-09-17T19:54:47.142" v="3567" actId="478"/>
-          <ac:spMkLst>
-            <pc:docMk/>
-            <pc:sldMk cId="506110610" sldId="609"/>
-            <ac:spMk id="14" creationId="{DD28DCDC-38DA-C047-BA44-A7094D57297E}"/>
           </ac:spMkLst>
         </pc:spChg>
         <pc:spChg chg="mod">
@@ -1463,30 +898,6 @@
             <ac:picMk id="4" creationId="{7BB8F996-C2C8-CB99-1AEB-66D6CB1F4CAD}"/>
           </ac:picMkLst>
         </pc:picChg>
-        <pc:picChg chg="del">
-          <ac:chgData name="Khobo, IL, Dr [ilkhobo@sun.ac.za]" userId="b519a442-dcea-4a28-9c45-7e29f1df5837" providerId="ADAL" clId="{8BC8A5CF-2DB3-45E9-BF57-F2ED810C291E}" dt="2026-09-17T19:54:43.890" v="3566" actId="478"/>
-          <ac:picMkLst>
-            <pc:docMk/>
-            <pc:sldMk cId="506110610" sldId="609"/>
-            <ac:picMk id="5" creationId="{B7AE4A28-4AEF-3C08-9AA1-F83991E49D98}"/>
-          </ac:picMkLst>
-        </pc:picChg>
-        <pc:picChg chg="del">
-          <ac:chgData name="Khobo, IL, Dr [ilkhobo@sun.ac.za]" userId="b519a442-dcea-4a28-9c45-7e29f1df5837" providerId="ADAL" clId="{8BC8A5CF-2DB3-45E9-BF57-F2ED810C291E}" dt="2026-09-17T19:54:43.890" v="3566" actId="478"/>
-          <ac:picMkLst>
-            <pc:docMk/>
-            <pc:sldMk cId="506110610" sldId="609"/>
-            <ac:picMk id="9" creationId="{0D666905-C9F2-9EFF-8333-7EEE42D007D8}"/>
-          </ac:picMkLst>
-        </pc:picChg>
-        <pc:picChg chg="del">
-          <ac:chgData name="Khobo, IL, Dr [ilkhobo@sun.ac.za]" userId="b519a442-dcea-4a28-9c45-7e29f1df5837" providerId="ADAL" clId="{8BC8A5CF-2DB3-45E9-BF57-F2ED810C291E}" dt="2026-09-17T19:54:43.890" v="3566" actId="478"/>
-          <ac:picMkLst>
-            <pc:docMk/>
-            <pc:sldMk cId="506110610" sldId="609"/>
-            <ac:picMk id="16" creationId="{75E4E525-EFD0-51AE-799C-4646EDC6B0D8}"/>
-          </ac:picMkLst>
-        </pc:picChg>
         <pc:inkChg chg="add del">
           <ac:chgData name="Khobo, IL, Dr [ilkhobo@sun.ac.za]" userId="b519a442-dcea-4a28-9c45-7e29f1df5837" providerId="ADAL" clId="{8BC8A5CF-2DB3-45E9-BF57-F2ED810C291E}" dt="2026-09-18T08:09:01.190" v="3909" actId="478"/>
           <ac:inkMkLst>
@@ -1495,21 +906,6 @@
             <ac:inkMk id="6" creationId="{5C05A18A-A9CA-85C4-13DB-9F7C98F69159}"/>
           </ac:inkMkLst>
         </pc:inkChg>
-        <pc:cxnChg chg="del">
-          <ac:chgData name="Khobo, IL, Dr [ilkhobo@sun.ac.za]" userId="b519a442-dcea-4a28-9c45-7e29f1df5837" providerId="ADAL" clId="{8BC8A5CF-2DB3-45E9-BF57-F2ED810C291E}" dt="2026-09-17T19:54:47.142" v="3567" actId="478"/>
-          <ac:cxnSpMkLst>
-            <pc:docMk/>
-            <pc:sldMk cId="506110610" sldId="609"/>
-            <ac:cxnSpMk id="11" creationId="{211809B2-ED4D-6589-FA1F-A7389FD22107}"/>
-          </ac:cxnSpMkLst>
-        </pc:cxnChg>
-      </pc:sldChg>
-      <pc:sldChg chg="add del">
-        <pc:chgData name="Khobo, IL, Dr [ilkhobo@sun.ac.za]" userId="b519a442-dcea-4a28-9c45-7e29f1df5837" providerId="ADAL" clId="{8BC8A5CF-2DB3-45E9-BF57-F2ED810C291E}" dt="2026-09-17T19:38:45.588" v="3450" actId="2696"/>
-        <pc:sldMkLst>
-          <pc:docMk/>
-          <pc:sldMk cId="2334165525" sldId="648"/>
-        </pc:sldMkLst>
       </pc:sldChg>
     </pc:docChg>
   </pc:docChgLst>
@@ -1645,7 +1041,7 @@
           <a:p>
             <a:fld id="{77A4F8E5-B141-4125-AE90-AB7E5CBBF318}" type="datetimeFigureOut">
               <a:rPr lang="en-ZA" smtClean="0"/>
-              <a:t>2026/09/18</a:t>
+              <a:t>2026/09/19</a:t>
             </a:fld>
             <a:endParaRPr lang="en-ZA"/>
           </a:p>
@@ -4337,7 +3733,7 @@
           <a:p>
             <a:fld id="{B97883AC-2ECA-4D97-B466-56E37F2202F1}" type="datetimeFigureOut">
               <a:rPr lang="en-ZA" smtClean="0"/>
-              <a:t>2026/09/18</a:t>
+              <a:t>2026/09/19</a:t>
             </a:fld>
             <a:endParaRPr lang="en-ZA"/>
           </a:p>
@@ -4537,7 +3933,7 @@
           <a:p>
             <a:fld id="{B97883AC-2ECA-4D97-B466-56E37F2202F1}" type="datetimeFigureOut">
               <a:rPr lang="en-ZA" smtClean="0"/>
-              <a:t>2026/09/18</a:t>
+              <a:t>2026/09/19</a:t>
             </a:fld>
             <a:endParaRPr lang="en-ZA"/>
           </a:p>
@@ -4747,7 +4143,7 @@
           <a:p>
             <a:fld id="{B97883AC-2ECA-4D97-B466-56E37F2202F1}" type="datetimeFigureOut">
               <a:rPr lang="en-ZA" smtClean="0"/>
-              <a:t>2026/09/18</a:t>
+              <a:t>2026/09/19</a:t>
             </a:fld>
             <a:endParaRPr lang="en-ZA"/>
           </a:p>
@@ -4947,7 +4343,7 @@
           <a:p>
             <a:fld id="{B97883AC-2ECA-4D97-B466-56E37F2202F1}" type="datetimeFigureOut">
               <a:rPr lang="en-ZA" smtClean="0"/>
-              <a:t>2026/09/18</a:t>
+              <a:t>2026/09/19</a:t>
             </a:fld>
             <a:endParaRPr lang="en-ZA"/>
           </a:p>
@@ -5223,7 +4619,7 @@
           <a:p>
             <a:fld id="{B97883AC-2ECA-4D97-B466-56E37F2202F1}" type="datetimeFigureOut">
               <a:rPr lang="en-ZA" smtClean="0"/>
-              <a:t>2026/09/18</a:t>
+              <a:t>2026/09/19</a:t>
             </a:fld>
             <a:endParaRPr lang="en-ZA"/>
           </a:p>
@@ -5491,7 +4887,7 @@
           <a:p>
             <a:fld id="{B97883AC-2ECA-4D97-B466-56E37F2202F1}" type="datetimeFigureOut">
               <a:rPr lang="en-ZA" smtClean="0"/>
-              <a:t>2026/09/18</a:t>
+              <a:t>2026/09/19</a:t>
             </a:fld>
             <a:endParaRPr lang="en-ZA"/>
           </a:p>
@@ -5906,7 +5302,7 @@
           <a:p>
             <a:fld id="{B97883AC-2ECA-4D97-B466-56E37F2202F1}" type="datetimeFigureOut">
               <a:rPr lang="en-ZA" smtClean="0"/>
-              <a:t>2026/09/18</a:t>
+              <a:t>2026/09/19</a:t>
             </a:fld>
             <a:endParaRPr lang="en-ZA"/>
           </a:p>
@@ -6048,7 +5444,7 @@
           <a:p>
             <a:fld id="{B97883AC-2ECA-4D97-B466-56E37F2202F1}" type="datetimeFigureOut">
               <a:rPr lang="en-ZA" smtClean="0"/>
-              <a:t>2026/09/18</a:t>
+              <a:t>2026/09/19</a:t>
             </a:fld>
             <a:endParaRPr lang="en-ZA"/>
           </a:p>
@@ -6161,7 +5557,7 @@
           <a:p>
             <a:fld id="{B97883AC-2ECA-4D97-B466-56E37F2202F1}" type="datetimeFigureOut">
               <a:rPr lang="en-ZA" smtClean="0"/>
-              <a:t>2026/09/18</a:t>
+              <a:t>2026/09/19</a:t>
             </a:fld>
             <a:endParaRPr lang="en-ZA"/>
           </a:p>
@@ -6474,7 +5870,7 @@
           <a:p>
             <a:fld id="{B97883AC-2ECA-4D97-B466-56E37F2202F1}" type="datetimeFigureOut">
               <a:rPr lang="en-ZA" smtClean="0"/>
-              <a:t>2026/09/18</a:t>
+              <a:t>2026/09/19</a:t>
             </a:fld>
             <a:endParaRPr lang="en-ZA"/>
           </a:p>
@@ -6763,7 +6159,7 @@
           <a:p>
             <a:fld id="{B97883AC-2ECA-4D97-B466-56E37F2202F1}" type="datetimeFigureOut">
               <a:rPr lang="en-ZA" smtClean="0"/>
-              <a:t>2026/09/18</a:t>
+              <a:t>2026/09/19</a:t>
             </a:fld>
             <a:endParaRPr lang="en-ZA"/>
           </a:p>
@@ -7006,7 +6402,7 @@
           <a:p>
             <a:fld id="{B97883AC-2ECA-4D97-B466-56E37F2202F1}" type="datetimeFigureOut">
               <a:rPr lang="en-ZA" smtClean="0"/>
-              <a:t>2026/09/18</a:t>
+              <a:t>2026/09/19</a:t>
             </a:fld>
             <a:endParaRPr lang="en-ZA"/>
           </a:p>
@@ -15923,13 +15319,22 @@
           <a:p>
             <a:pPr algn="ctr"/>
             <a:r>
+              <a:rPr lang="en-US" sz="2000" b="1">
+                <a:solidFill>
+                  <a:srgbClr val="FF0000"/>
+                </a:solidFill>
+                <a:latin typeface="LM Roman 12" panose="00000500000000000000" pitchFamily="50" charset="0"/>
+              </a:rPr>
+              <a:t>Constant </a:t>
+            </a:r>
+            <a:r>
               <a:rPr lang="en-US" sz="2000" b="1" dirty="0">
                 <a:solidFill>
                   <a:srgbClr val="FF0000"/>
                 </a:solidFill>
                 <a:latin typeface="LM Roman 12" panose="00000500000000000000" pitchFamily="50" charset="0"/>
               </a:rPr>
-              <a:t>Non-constant data </a:t>
+              <a:t>data </a:t>
             </a:r>
             <a:r>
               <a:rPr lang="en-US" sz="2000" dirty="0">
@@ -15938,16 +15343,34 @@
                 </a:solidFill>
                 <a:latin typeface="LM Roman 12" panose="00000500000000000000" pitchFamily="50" charset="0"/>
               </a:rPr>
-              <a:t>– the integer the pointer points to </a:t>
+              <a:t>– the integer the pointer points </a:t>
             </a:r>
             <a:r>
-              <a:rPr lang="en-US" sz="2000" b="1" dirty="0">
+              <a:rPr lang="en-US" sz="2000">
                 <a:solidFill>
                   <a:schemeClr val="tx1"/>
                 </a:solidFill>
                 <a:latin typeface="LM Roman 12" panose="00000500000000000000" pitchFamily="50" charset="0"/>
               </a:rPr>
-              <a:t>CAN</a:t>
+              <a:t>to </a:t>
+            </a:r>
+            <a:r>
+              <a:rPr lang="en-US" sz="2000" b="1">
+                <a:solidFill>
+                  <a:schemeClr val="tx1"/>
+                </a:solidFill>
+                <a:latin typeface="LM Roman 12" panose="00000500000000000000" pitchFamily="50" charset="0"/>
+              </a:rPr>
+              <a:t>CANNOT</a:t>
+            </a:r>
+            <a:r>
+              <a:rPr lang="en-US" sz="2000">
+                <a:solidFill>
+                  <a:schemeClr val="tx1"/>
+                </a:solidFill>
+                <a:latin typeface="LM Roman 12" panose="00000500000000000000" pitchFamily="50" charset="0"/>
+              </a:rPr>
+              <a:t> </a:t>
             </a:r>
             <a:r>
               <a:rPr lang="en-US" sz="2000" dirty="0">
@@ -15956,7 +15379,7 @@
                 </a:solidFill>
                 <a:latin typeface="LM Roman 12" panose="00000500000000000000" pitchFamily="50" charset="0"/>
               </a:rPr>
-              <a:t> be changed</a:t>
+              <a:t>be changed</a:t>
             </a:r>
           </a:p>
           <a:p>
